--- a/generated_onenote_pages/04_Releases_and_Deployment/01_Production_Release_Process__release-process-overview.pptx
+++ b/generated_onenote_pages/04_Releases_and_Deployment/01_Production_Release_Process__release-process-overview.pptx
@@ -3126,6 +3126,11 @@
         <p:txBody>
           <a:bodyPr/>
           <a:lstStyle/>
+          <a:p>
+            <a:r>
+              <a:t>Attached to the "Production Release Process" release process in the Releases and Deployment section, owned by Release Management.</a:t>
+            </a:r>
+          </a:p>
           <a:p>
             <a:r>
               <a:t>Overview deck for new release managers.</a:t>
